--- a/outputs/pptx/挑戦KR2のKPIについて.pptx
+++ b/outputs/pptx/挑戦KR2のKPIについて.pptx
@@ -5,7 +5,7 @@
     <p:sldMasterId id="2147483648" r:id="rId1"/>
   </p:sldMasterIdLst>
   <p:notesMasterIdLst>
-    <p:notesMasterId r:id="rId7"/>
+    <p:notesMasterId r:id="rId8"/>
   </p:notesMasterIdLst>
   <p:sldIdLst>
     <p:sldId id="256" r:id="rId2"/>
@@ -13,6 +13,7 @@
     <p:sldId id="258" r:id="rId4"/>
     <p:sldId id="259" r:id="rId5"/>
     <p:sldId id="260" r:id="rId6"/>
+    <p:sldId id="262" r:id="rId7"/>
   </p:sldIdLst>
   <p:sldSz cx="9144000" cy="5143500" type="screen16x9"/>
   <p:notesSz cx="5143500" cy="9144000"/>
@@ -661,6 +662,114 @@
 </p:notes>
 </file>
 
+<file path=ppt/notesSlides/notesSlide6.xml><?xml version="1.0" encoding="utf-8"?>
+<p:notes xmlns:a="http://schemas.openxmlformats.org/drawingml/2006/main" xmlns:r="http://schemas.openxmlformats.org/officeDocument/2006/relationships" xmlns:p="http://schemas.openxmlformats.org/presentationml/2006/main">
+  <p:cSld>
+    <p:spTree>
+      <p:nvGrpSpPr>
+        <p:cNvPr id="1" name="">
+          <a:extLst>
+            <a:ext uri="{FF2B5EF4-FFF2-40B4-BE49-F238E27FC236}">
+              <a16:creationId xmlns:a16="http://schemas.microsoft.com/office/drawing/2014/main" id="{FBA7B7B4-3755-DCE5-473C-01DBC1C12786}"/>
+            </a:ext>
+          </a:extLst>
+        </p:cNvPr>
+        <p:cNvGrpSpPr/>
+        <p:nvPr/>
+      </p:nvGrpSpPr>
+      <p:grpSpPr>
+        <a:xfrm>
+          <a:off x="0" y="0"/>
+          <a:ext cx="0" cy="0"/>
+          <a:chOff x="0" y="0"/>
+          <a:chExt cx="0" cy="0"/>
+        </a:xfrm>
+      </p:grpSpPr>
+      <p:sp>
+        <p:nvSpPr>
+          <p:cNvPr id="2" name="Slide Image Placeholder 1">
+            <a:extLst>
+              <a:ext uri="{FF2B5EF4-FFF2-40B4-BE49-F238E27FC236}">
+                <a16:creationId xmlns:a16="http://schemas.microsoft.com/office/drawing/2014/main" id="{60A2FDDD-7139-898D-EF91-8A0D66DF1273}"/>
+              </a:ext>
+            </a:extLst>
+          </p:cNvPr>
+          <p:cNvSpPr>
+            <a:spLocks noGrp="1" noRot="1" noChangeAspect="1"/>
+          </p:cNvSpPr>
+          <p:nvPr>
+            <p:ph type="sldImg"/>
+          </p:nvPr>
+        </p:nvSpPr>
+        <p:spPr/>
+      </p:sp>
+      <p:sp>
+        <p:nvSpPr>
+          <p:cNvPr id="3" name="Notes Placeholder 2">
+            <a:extLst>
+              <a:ext uri="{FF2B5EF4-FFF2-40B4-BE49-F238E27FC236}">
+                <a16:creationId xmlns:a16="http://schemas.microsoft.com/office/drawing/2014/main" id="{27D942D1-2893-EDEB-1592-676CBD27020B}"/>
+              </a:ext>
+            </a:extLst>
+          </p:cNvPr>
+          <p:cNvSpPr>
+            <a:spLocks noGrp="1"/>
+          </p:cNvSpPr>
+          <p:nvPr>
+            <p:ph type="body" idx="1"/>
+          </p:nvPr>
+        </p:nvSpPr>
+        <p:spPr/>
+        <p:txBody>
+          <a:bodyPr/>
+          <a:lstStyle/>
+          <a:p>
+            <a:endParaRPr lang="en-US" dirty="0"/>
+          </a:p>
+        </p:txBody>
+      </p:sp>
+      <p:sp>
+        <p:nvSpPr>
+          <p:cNvPr id="4" name="Slide Number Placeholder 3">
+            <a:extLst>
+              <a:ext uri="{FF2B5EF4-FFF2-40B4-BE49-F238E27FC236}">
+                <a16:creationId xmlns:a16="http://schemas.microsoft.com/office/drawing/2014/main" id="{421E2FC5-0F46-1EB5-E0B9-0A9DA18EA197}"/>
+              </a:ext>
+            </a:extLst>
+          </p:cNvPr>
+          <p:cNvSpPr>
+            <a:spLocks noGrp="1"/>
+          </p:cNvSpPr>
+          <p:nvPr>
+            <p:ph type="sldNum" sz="quarter" idx="10"/>
+          </p:nvPr>
+        </p:nvSpPr>
+        <p:spPr/>
+        <p:txBody>
+          <a:bodyPr/>
+          <a:lstStyle/>
+          <a:p>
+            <a:fld id="{F7021451-1387-4CA6-816F-3879F97B5CBC}" type="slidenum">
+              <a:rPr lang="en-US"/>
+              <a:t>6</a:t>
+            </a:fld>
+            <a:endParaRPr lang="en-US"/>
+          </a:p>
+        </p:txBody>
+      </p:sp>
+    </p:spTree>
+    <p:extLst>
+      <p:ext uri="{BB962C8B-B14F-4D97-AF65-F5344CB8AC3E}">
+        <p14:creationId xmlns:p14="http://schemas.microsoft.com/office/powerpoint/2010/main" val="2862854857"/>
+      </p:ext>
+    </p:extLst>
+  </p:cSld>
+  <p:clrMapOvr>
+    <a:masterClrMapping/>
+  </p:clrMapOvr>
+</p:notes>
+</file>
+
 <file path=ppt/slideLayouts/slideLayout1.xml><?xml version="1.0" encoding="utf-8"?>
 <p:sldLayout xmlns:a="http://schemas.openxmlformats.org/drawingml/2006/main" xmlns:r="http://schemas.openxmlformats.org/officeDocument/2006/relationships" xmlns:p="http://schemas.openxmlformats.org/presentationml/2006/main" preserve="1">
   <p:cSld name="DEFAULT">
@@ -1779,9 +1888,6 @@
             </a:pPr>
             <a:r>
               <a:rPr lang="en-US" sz="1100" dirty="0" err="1">
-                <a:solidFill>
-                  <a:srgbClr val="444466"/>
-                </a:solidFill>
                 <a:latin typeface="Meiryo" pitchFamily="34" charset="0"/>
                 <a:ea typeface="Meiryo" pitchFamily="34" charset="-122"/>
                 <a:cs typeface="Meiryo" pitchFamily="34" charset="-120"/>
@@ -1790,9 +1896,6 @@
             </a:r>
             <a:r>
               <a:rPr lang="en-US" sz="1100" dirty="0">
-                <a:solidFill>
-                  <a:srgbClr val="444466"/>
-                </a:solidFill>
                 <a:latin typeface="Meiryo" pitchFamily="34" charset="0"/>
                 <a:ea typeface="Meiryo" pitchFamily="34" charset="-122"/>
                 <a:cs typeface="Meiryo" pitchFamily="34" charset="-120"/>
@@ -1809,9 +1912,6 @@
             </a:pPr>
             <a:r>
               <a:rPr lang="en-US" sz="1100" dirty="0" err="1">
-                <a:solidFill>
-                  <a:srgbClr val="444466"/>
-                </a:solidFill>
                 <a:latin typeface="Meiryo" pitchFamily="34" charset="0"/>
                 <a:ea typeface="Meiryo" pitchFamily="34" charset="-122"/>
                 <a:cs typeface="Meiryo" pitchFamily="34" charset="-120"/>
@@ -2810,7 +2910,7 @@
             <a:r>
               <a:rPr lang="en-US" sz="1600" b="1" dirty="0">
                 <a:solidFill>
-                  <a:srgbClr val="004098"/>
+                  <a:srgbClr val="002060"/>
                 </a:solidFill>
                 <a:latin typeface="Arial" pitchFamily="34" charset="0"/>
                 <a:ea typeface="Arial" pitchFamily="34" charset="-122"/>
@@ -2821,7 +2921,7 @@
             <a:r>
               <a:rPr lang="en-US" sz="1600" b="1" dirty="0">
                 <a:solidFill>
-                  <a:srgbClr val="004098"/>
+                  <a:srgbClr val="002060"/>
                 </a:solidFill>
                 <a:latin typeface="Meiryo" pitchFamily="34" charset="0"/>
                 <a:ea typeface="Meiryo" pitchFamily="34" charset="-122"/>
@@ -2829,7 +2929,11 @@
               </a:rPr>
               <a:t>①　試行回数</a:t>
             </a:r>
-            <a:endParaRPr lang="en-US" sz="1600" dirty="0"/>
+            <a:endParaRPr lang="en-US" sz="1600" dirty="0">
+              <a:solidFill>
+                <a:srgbClr val="002060"/>
+              </a:solidFill>
+            </a:endParaRPr>
           </a:p>
         </p:txBody>
       </p:sp>
@@ -2905,9 +3009,24 @@
                 <a:ea typeface="Meiryo" pitchFamily="34" charset="-122"/>
                 <a:cs typeface="Meiryo" pitchFamily="34" charset="-120"/>
               </a:rPr>
-              <a:t>思いついてから届けるまでの時間が短い ＝ 試行回数が増える</a:t>
-            </a:r>
-            <a:endParaRPr lang="en-US" sz="1400" dirty="0"/>
+              <a:t>思いついてから届けるまでの時間が短い ＝ </a:t>
+            </a:r>
+            <a:r>
+              <a:rPr lang="en-US" sz="1400" b="1" dirty="0">
+                <a:solidFill>
+                  <a:schemeClr val="accent1"/>
+                </a:solidFill>
+                <a:latin typeface="Meiryo" pitchFamily="34" charset="0"/>
+                <a:ea typeface="Meiryo" pitchFamily="34" charset="-122"/>
+                <a:cs typeface="Meiryo" pitchFamily="34" charset="-120"/>
+              </a:rPr>
+              <a:t>試行回数が増える</a:t>
+            </a:r>
+            <a:endParaRPr lang="en-US" sz="1400" b="1" dirty="0">
+              <a:solidFill>
+                <a:schemeClr val="accent1"/>
+              </a:solidFill>
+            </a:endParaRPr>
           </a:p>
         </p:txBody>
       </p:sp>
@@ -2967,7 +3086,7 @@
             <a:r>
               <a:rPr lang="en-US" sz="1600" b="1" dirty="0">
                 <a:solidFill>
-                  <a:schemeClr val="accent1"/>
+                  <a:srgbClr val="002060"/>
                 </a:solidFill>
                 <a:latin typeface="Arial" pitchFamily="34" charset="0"/>
                 <a:ea typeface="Arial" pitchFamily="34" charset="-122"/>
@@ -2978,97 +3097,123 @@
             <a:r>
               <a:rPr lang="en-US" sz="1600" b="1" dirty="0">
                 <a:solidFill>
+                  <a:srgbClr val="002060"/>
+                </a:solidFill>
+                <a:latin typeface="Meiryo" pitchFamily="34" charset="0"/>
+                <a:ea typeface="Meiryo" pitchFamily="34" charset="-122"/>
+                <a:cs typeface="Meiryo" pitchFamily="34" charset="-120"/>
+              </a:rPr>
+              <a:t>②　施策の精度</a:t>
+            </a:r>
+            <a:endParaRPr lang="en-US" sz="1600" dirty="0">
+              <a:solidFill>
+                <a:srgbClr val="002060"/>
+              </a:solidFill>
+            </a:endParaRPr>
+          </a:p>
+        </p:txBody>
+      </p:sp>
+      <p:sp>
+        <p:nvSpPr>
+          <p:cNvPr id="20" name="Text 18"/>
+          <p:cNvSpPr/>
+          <p:nvPr/>
+        </p:nvSpPr>
+        <p:spPr>
+          <a:xfrm>
+            <a:off x="432099" y="4113085"/>
+            <a:ext cx="8046720" cy="365760"/>
+          </a:xfrm>
+          <a:prstGeom prst="rect">
+            <a:avLst/>
+          </a:prstGeom>
+          <a:noFill/>
+          <a:ln/>
+        </p:spPr>
+        <p:txBody>
+          <a:bodyPr wrap="square" rtlCol="0" anchor="ctr"/>
+          <a:lstStyle/>
+          <a:p>
+            <a:pPr marL="0" indent="0" algn="l">
+              <a:buNone/>
+            </a:pPr>
+            <a:r>
+              <a:rPr lang="en-US" sz="1600" b="1" dirty="0">
+                <a:solidFill>
+                  <a:srgbClr val="1A1A2E"/>
+                </a:solidFill>
+                <a:latin typeface="Meiryo" pitchFamily="34" charset="0"/>
+                <a:ea typeface="Meiryo" pitchFamily="34" charset="-122"/>
+                <a:cs typeface="Meiryo" pitchFamily="34" charset="-120"/>
+              </a:rPr>
+              <a:t>リリース後の検証結果 → 次の施策への反映までのリードタイムが平均1ヶ月以内</a:t>
+            </a:r>
+            <a:endParaRPr lang="en-US" sz="1600" dirty="0"/>
+          </a:p>
+        </p:txBody>
+      </p:sp>
+      <p:sp>
+        <p:nvSpPr>
+          <p:cNvPr id="21" name="Text 19"/>
+          <p:cNvSpPr/>
+          <p:nvPr/>
+        </p:nvSpPr>
+        <p:spPr>
+          <a:xfrm>
+            <a:off x="432099" y="4550563"/>
+            <a:ext cx="8046720" cy="274320"/>
+          </a:xfrm>
+          <a:prstGeom prst="rect">
+            <a:avLst/>
+          </a:prstGeom>
+          <a:noFill/>
+          <a:ln/>
+        </p:spPr>
+        <p:txBody>
+          <a:bodyPr wrap="square" rtlCol="0" anchor="ctr"/>
+          <a:lstStyle/>
+          <a:p>
+            <a:pPr marL="0" indent="0" algn="l">
+              <a:buNone/>
+            </a:pPr>
+            <a:r>
+              <a:rPr lang="en-US" sz="1400" dirty="0" err="1">
+                <a:solidFill>
+                  <a:srgbClr val="444466"/>
+                </a:solidFill>
+                <a:latin typeface="Meiryo" pitchFamily="34" charset="0"/>
+                <a:ea typeface="Meiryo" pitchFamily="34" charset="-122"/>
+                <a:cs typeface="Meiryo" pitchFamily="34" charset="-120"/>
+              </a:rPr>
+              <a:t>リリースした効果を見て「次に何をやるか」を柔軟に変えられる</a:t>
+            </a:r>
+            <a:r>
+              <a:rPr lang="en-US" sz="1400" dirty="0">
+                <a:solidFill>
+                  <a:srgbClr val="444466"/>
+                </a:solidFill>
+                <a:latin typeface="Meiryo" pitchFamily="34" charset="0"/>
+                <a:ea typeface="Meiryo" pitchFamily="34" charset="-122"/>
+                <a:cs typeface="Meiryo" pitchFamily="34" charset="-120"/>
+              </a:rPr>
+              <a:t> ＝ </a:t>
+            </a:r>
+            <a:r>
+              <a:rPr lang="en-US" sz="1400" b="1" dirty="0">
+                <a:solidFill>
                   <a:schemeClr val="accent1"/>
                 </a:solidFill>
                 <a:latin typeface="Meiryo" pitchFamily="34" charset="0"/>
                 <a:ea typeface="Meiryo" pitchFamily="34" charset="-122"/>
                 <a:cs typeface="Meiryo" pitchFamily="34" charset="-120"/>
               </a:rPr>
-              <a:t>②　施策の精度</a:t>
-            </a:r>
-            <a:endParaRPr lang="en-US" sz="1600" dirty="0">
+              <a:t>施策の精度が上がる</a:t>
+            </a:r>
+            <a:endParaRPr lang="en-US" sz="1400" b="1" dirty="0">
               <a:solidFill>
                 <a:schemeClr val="accent1"/>
               </a:solidFill>
             </a:endParaRPr>
-          </a:p>
-        </p:txBody>
-      </p:sp>
-      <p:sp>
-        <p:nvSpPr>
-          <p:cNvPr id="20" name="Text 18"/>
-          <p:cNvSpPr/>
-          <p:nvPr/>
-        </p:nvSpPr>
-        <p:spPr>
-          <a:xfrm>
-            <a:off x="432099" y="4113085"/>
-            <a:ext cx="8046720" cy="365760"/>
-          </a:xfrm>
-          <a:prstGeom prst="rect">
-            <a:avLst/>
-          </a:prstGeom>
-          <a:noFill/>
-          <a:ln/>
-        </p:spPr>
-        <p:txBody>
-          <a:bodyPr wrap="square" rtlCol="0" anchor="ctr"/>
-          <a:lstStyle/>
-          <a:p>
-            <a:pPr marL="0" indent="0" algn="l">
-              <a:buNone/>
-            </a:pPr>
-            <a:r>
-              <a:rPr lang="en-US" sz="1600" b="1" dirty="0">
-                <a:solidFill>
-                  <a:srgbClr val="1A1A2E"/>
-                </a:solidFill>
-                <a:latin typeface="Meiryo" pitchFamily="34" charset="0"/>
-                <a:ea typeface="Meiryo" pitchFamily="34" charset="-122"/>
-                <a:cs typeface="Meiryo" pitchFamily="34" charset="-120"/>
-              </a:rPr>
-              <a:t>リリース後の検証結果 → 次の施策への反映までのリードタイムが平均1ヶ月以内</a:t>
-            </a:r>
-            <a:endParaRPr lang="en-US" sz="1600" dirty="0"/>
-          </a:p>
-        </p:txBody>
-      </p:sp>
-      <p:sp>
-        <p:nvSpPr>
-          <p:cNvPr id="21" name="Text 19"/>
-          <p:cNvSpPr/>
-          <p:nvPr/>
-        </p:nvSpPr>
-        <p:spPr>
-          <a:xfrm>
-            <a:off x="432099" y="4550563"/>
-            <a:ext cx="8046720" cy="274320"/>
-          </a:xfrm>
-          <a:prstGeom prst="rect">
-            <a:avLst/>
-          </a:prstGeom>
-          <a:noFill/>
-          <a:ln/>
-        </p:spPr>
-        <p:txBody>
-          <a:bodyPr wrap="square" rtlCol="0" anchor="ctr"/>
-          <a:lstStyle/>
-          <a:p>
-            <a:pPr marL="0" indent="0" algn="l">
-              <a:buNone/>
-            </a:pPr>
-            <a:r>
-              <a:rPr lang="en-US" sz="1400" dirty="0">
-                <a:solidFill>
-                  <a:srgbClr val="444466"/>
-                </a:solidFill>
-                <a:latin typeface="Meiryo" pitchFamily="34" charset="0"/>
-                <a:ea typeface="Meiryo" pitchFamily="34" charset="-122"/>
-                <a:cs typeface="Meiryo" pitchFamily="34" charset="-120"/>
-              </a:rPr>
-              <a:t>出した結果を見て「次に何をやるか」を変えられる ＝ 施策の精度が上がる</a:t>
-            </a:r>
-            <a:endParaRPr lang="en-US" sz="1400" dirty="0"/>
           </a:p>
         </p:txBody>
       </p:sp>
@@ -3321,7 +3466,7 @@
               <a:buNone/>
             </a:pPr>
             <a:r>
-              <a:rPr lang="en-US" sz="1100" b="1" dirty="0">
+              <a:rPr lang="en-US" sz="1600" b="1" dirty="0">
                 <a:solidFill>
                   <a:srgbClr val="004098"/>
                 </a:solidFill>
@@ -3332,7 +3477,7 @@
               <a:t>KPI </a:t>
             </a:r>
             <a:r>
-              <a:rPr lang="en-US" sz="1100" b="1" dirty="0">
+              <a:rPr lang="en-US" sz="1600" b="1" dirty="0">
                 <a:solidFill>
                   <a:srgbClr val="004098"/>
                 </a:solidFill>
@@ -3340,9 +3485,20 @@
                 <a:ea typeface="Meiryo" pitchFamily="34" charset="-122"/>
                 <a:cs typeface="Meiryo" pitchFamily="34" charset="-120"/>
               </a:rPr>
-              <a:t>①　試行回数</a:t>
-            </a:r>
-            <a:endParaRPr lang="en-US" sz="1100" dirty="0"/>
+              <a:t>①　</a:t>
+            </a:r>
+            <a:r>
+              <a:rPr lang="en-US" sz="1600" b="1" dirty="0" err="1">
+                <a:solidFill>
+                  <a:srgbClr val="004098"/>
+                </a:solidFill>
+                <a:latin typeface="Meiryo" pitchFamily="34" charset="0"/>
+                <a:ea typeface="Meiryo" pitchFamily="34" charset="-122"/>
+                <a:cs typeface="Meiryo" pitchFamily="34" charset="-120"/>
+              </a:rPr>
+              <a:t>試行回数を増やす</a:t>
+            </a:r>
+            <a:endParaRPr lang="en-US" sz="1600" dirty="0"/>
           </a:p>
         </p:txBody>
       </p:sp>
@@ -3379,29 +3535,7 @@
                 <a:ea typeface="Meiryo" pitchFamily="34" charset="-122"/>
                 <a:cs typeface="Meiryo" pitchFamily="34" charset="-120"/>
               </a:rPr>
-              <a:t>顧客価値領域の施策について「企画</a:t>
-            </a:r>
-            <a:r>
-              <a:rPr lang="en-US" sz="1600" b="1" dirty="0">
-                <a:solidFill>
-                  <a:srgbClr val="1A1A2E"/>
-                </a:solidFill>
-                <a:latin typeface="Meiryo" pitchFamily="34" charset="0"/>
-                <a:ea typeface="Meiryo" pitchFamily="34" charset="-122"/>
-                <a:cs typeface="Meiryo" pitchFamily="34" charset="-120"/>
-              </a:rPr>
-              <a:t> </a:t>
-            </a:r>
-            <a:r>
-              <a:rPr lang="en-US" sz="1600" b="1" dirty="0" err="1">
-                <a:solidFill>
-                  <a:srgbClr val="1A1A2E"/>
-                </a:solidFill>
-                <a:latin typeface="Meiryo" pitchFamily="34" charset="0"/>
-                <a:ea typeface="Meiryo" pitchFamily="34" charset="-122"/>
-                <a:cs typeface="Meiryo" pitchFamily="34" charset="-120"/>
-              </a:rPr>
-              <a:t>から</a:t>
+              <a:t>顧客価値領域の開発について「企画から</a:t>
             </a:r>
             <a:r>
               <a:rPr lang="en-US" sz="1600" b="1" dirty="0">
@@ -3622,7 +3756,7 @@
                 <a:ea typeface="Meiryo" pitchFamily="34" charset="-122"/>
                 <a:cs typeface="Meiryo" pitchFamily="34" charset="-120"/>
               </a:rPr>
-              <a:t>試したい施策を、平均1ヶ月以内にお客様に届けて反応を見れる。試行回数が多いから、当たる施策を早く見つけられる。</a:t>
+              <a:t>試したい施策を、平均1ヶ月以内にお客様に届けて反応を見れる。試行回数が多いので、当たる施策を早く見つけられる。</a:t>
             </a:r>
             <a:endParaRPr lang="en-US" sz="1300" dirty="0"/>
           </a:p>
@@ -3682,15 +3816,14 @@
               <a:buNone/>
             </a:pPr>
             <a:r>
-              <a:rPr lang="en-US" sz="1600" b="1" dirty="0">
+              <a:rPr lang="en-US" sz="1600" b="1" dirty="0" err="1">
                 <a:solidFill>
                   <a:srgbClr val="444466"/>
                 </a:solidFill>
                 <a:latin typeface="Meiryo" pitchFamily="34" charset="0"/>
                 <a:ea typeface="Meiryo" pitchFamily="34" charset="-122"/>
-                <a:cs typeface="Meiryo" pitchFamily="34" charset="-120"/>
-              </a:rPr>
-              <a:t>最低ライン</a:t>
+              </a:rPr>
+              <a:t>現状</a:t>
             </a:r>
             <a:endParaRPr lang="en-US" sz="1600" b="1" dirty="0"/>
           </a:p>
@@ -3758,7 +3891,29 @@
                 <a:ea typeface="Meiryo" pitchFamily="34" charset="-122"/>
                 <a:cs typeface="Meiryo" pitchFamily="34" charset="-120"/>
               </a:rPr>
-              <a:t>企画 → リリース　平均 3ヶ月以上</a:t>
+              <a:t>企画 → </a:t>
+            </a:r>
+            <a:r>
+              <a:rPr lang="en-US" sz="1200" b="1" dirty="0" err="1">
+                <a:solidFill>
+                  <a:srgbClr val="FFFFFF"/>
+                </a:solidFill>
+                <a:latin typeface="Meiryo" pitchFamily="34" charset="0"/>
+                <a:ea typeface="Meiryo" pitchFamily="34" charset="-122"/>
+                <a:cs typeface="Meiryo" pitchFamily="34" charset="-120"/>
+              </a:rPr>
+              <a:t>リリース</a:t>
+            </a:r>
+            <a:r>
+              <a:rPr lang="en-US" sz="1200" b="1" dirty="0">
+                <a:solidFill>
+                  <a:srgbClr val="FFFFFF"/>
+                </a:solidFill>
+                <a:latin typeface="Meiryo" pitchFamily="34" charset="0"/>
+                <a:ea typeface="Meiryo" pitchFamily="34" charset="-122"/>
+                <a:cs typeface="Meiryo" pitchFamily="34" charset="-120"/>
+              </a:rPr>
+              <a:t>　3ヶ月〜9か月以上</a:t>
             </a:r>
             <a:endParaRPr lang="en-US" sz="1200" dirty="0"/>
           </a:p>
@@ -3773,7 +3928,7 @@
         <p:spPr>
           <a:xfrm>
             <a:off x="4983480" y="2788920"/>
-            <a:ext cx="3611880" cy="1828800"/>
+            <a:ext cx="3691984" cy="1828800"/>
           </a:xfrm>
           <a:prstGeom prst="rect">
             <a:avLst/>
@@ -3800,7 +3955,7 @@
                 <a:ea typeface="Meiryo" pitchFamily="34" charset="-122"/>
                 <a:cs typeface="Meiryo" pitchFamily="34" charset="-120"/>
               </a:rPr>
-              <a:t>試したい施策が、お客様に届くまで平均3ヶ月以上かかる。大型案件に引きずられ、新しいことを試す回数が限られる。当たる施策にたどり着く前に時間切れになりやすい。</a:t>
+              <a:t>試したい施策が、お客様に届くまでに時間が3ヶ月以上かかる。Krakenなどの大型案件に引きずられ、効果が高い施策を見つけるための試行回数が限られている</a:t>
             </a:r>
             <a:endParaRPr lang="en-US" sz="1300" dirty="0"/>
           </a:p>
@@ -3999,7 +4154,7 @@
               <a:buNone/>
             </a:pPr>
             <a:r>
-              <a:rPr lang="en-US" sz="1100" b="1" dirty="0">
+              <a:rPr lang="en-US" sz="1600" b="1" dirty="0">
                 <a:solidFill>
                   <a:srgbClr val="546E8A"/>
                 </a:solidFill>
@@ -4010,7 +4165,7 @@
               <a:t>KPI </a:t>
             </a:r>
             <a:r>
-              <a:rPr lang="en-US" sz="1100" b="1" dirty="0">
+              <a:rPr lang="en-US" sz="1600" b="1" dirty="0">
                 <a:solidFill>
                   <a:srgbClr val="546E8A"/>
                 </a:solidFill>
@@ -4018,9 +4173,20 @@
                 <a:ea typeface="Meiryo" pitchFamily="34" charset="-122"/>
                 <a:cs typeface="Meiryo" pitchFamily="34" charset="-120"/>
               </a:rPr>
-              <a:t>②　施策の精度</a:t>
-            </a:r>
-            <a:endParaRPr lang="en-US" sz="1100" dirty="0"/>
+              <a:t>②　</a:t>
+            </a:r>
+            <a:r>
+              <a:rPr lang="en-US" sz="1600" b="1" dirty="0" err="1">
+                <a:solidFill>
+                  <a:srgbClr val="546E8A"/>
+                </a:solidFill>
+                <a:latin typeface="Meiryo" pitchFamily="34" charset="0"/>
+                <a:ea typeface="Meiryo" pitchFamily="34" charset="-122"/>
+                <a:cs typeface="Meiryo" pitchFamily="34" charset="-120"/>
+              </a:rPr>
+              <a:t>施策の精度を上げる</a:t>
+            </a:r>
+            <a:endParaRPr lang="en-US" sz="1600" dirty="0"/>
           </a:p>
         </p:txBody>
       </p:sp>
@@ -4217,6 +4383,17 @@
               <a:buNone/>
             </a:pPr>
             <a:r>
+              <a:rPr lang="en-US" sz="1200" b="1" dirty="0" err="1">
+                <a:solidFill>
+                  <a:srgbClr val="FFFFFF"/>
+                </a:solidFill>
+                <a:latin typeface="Meiryo" pitchFamily="34" charset="0"/>
+                <a:ea typeface="Meiryo" pitchFamily="34" charset="-122"/>
+                <a:cs typeface="Meiryo" pitchFamily="34" charset="-120"/>
+              </a:rPr>
+              <a:t>検証</a:t>
+            </a:r>
+            <a:r>
               <a:rPr lang="en-US" sz="1200" b="1" dirty="0">
                 <a:solidFill>
                   <a:srgbClr val="FFFFFF"/>
@@ -4225,7 +4402,51 @@
                 <a:ea typeface="Meiryo" pitchFamily="34" charset="-122"/>
                 <a:cs typeface="Meiryo" pitchFamily="34" charset="-120"/>
               </a:rPr>
-              <a:t>検証 → 次の施策へ反映　平均 1ヶ月以内</a:t>
+              <a:t> → </a:t>
+            </a:r>
+            <a:r>
+              <a:rPr lang="en-US" sz="1200" b="1" dirty="0" err="1">
+                <a:solidFill>
+                  <a:srgbClr val="FFFFFF"/>
+                </a:solidFill>
+                <a:latin typeface="Meiryo" pitchFamily="34" charset="0"/>
+                <a:ea typeface="Meiryo" pitchFamily="34" charset="-122"/>
+                <a:cs typeface="Meiryo" pitchFamily="34" charset="-120"/>
+              </a:rPr>
+              <a:t>次の開発へ反映</a:t>
+            </a:r>
+            <a:r>
+              <a:rPr lang="en-US" sz="1200" b="1" dirty="0">
+                <a:solidFill>
+                  <a:srgbClr val="FFFFFF"/>
+                </a:solidFill>
+                <a:latin typeface="Meiryo" pitchFamily="34" charset="0"/>
+                <a:ea typeface="Meiryo" pitchFamily="34" charset="-122"/>
+                <a:cs typeface="Meiryo" pitchFamily="34" charset="-120"/>
+              </a:rPr>
+              <a:t>　</a:t>
+            </a:r>
+            <a:r>
+              <a:rPr lang="en-US" sz="1200" b="1" dirty="0" err="1">
+                <a:solidFill>
+                  <a:srgbClr val="FFFFFF"/>
+                </a:solidFill>
+                <a:latin typeface="Meiryo" pitchFamily="34" charset="0"/>
+                <a:ea typeface="Meiryo" pitchFamily="34" charset="-122"/>
+                <a:cs typeface="Meiryo" pitchFamily="34" charset="-120"/>
+              </a:rPr>
+              <a:t>平均</a:t>
+            </a:r>
+            <a:r>
+              <a:rPr lang="en-US" sz="1200" b="1" dirty="0">
+                <a:solidFill>
+                  <a:srgbClr val="FFFFFF"/>
+                </a:solidFill>
+                <a:latin typeface="Meiryo" pitchFamily="34" charset="0"/>
+                <a:ea typeface="Meiryo" pitchFamily="34" charset="-122"/>
+                <a:cs typeface="Meiryo" pitchFamily="34" charset="-120"/>
+              </a:rPr>
+              <a:t> 1ヶ月以内</a:t>
             </a:r>
             <a:endParaRPr lang="en-US" sz="1200" dirty="0"/>
           </a:p>
@@ -4240,6 +4461,183 @@
         <p:spPr>
           <a:xfrm>
             <a:off x="548640" y="2788920"/>
+            <a:ext cx="3611880" cy="1828800"/>
+          </a:xfrm>
+          <a:prstGeom prst="rect">
+            <a:avLst/>
+          </a:prstGeom>
+          <a:noFill/>
+          <a:ln/>
+        </p:spPr>
+        <p:txBody>
+          <a:bodyPr wrap="square" rtlCol="0" anchor="t"/>
+          <a:lstStyle/>
+          <a:p>
+            <a:pPr>
+              <a:lnSpc>
+                <a:spcPct val="160000"/>
+              </a:lnSpc>
+            </a:pPr>
+            <a:r>
+              <a:rPr lang="ja-JP" altLang="en-US" sz="1300">
+                <a:solidFill>
+                  <a:srgbClr val="1A1A2E"/>
+                </a:solidFill>
+                <a:latin typeface="Meiryo" pitchFamily="34" charset="0"/>
+                <a:ea typeface="Meiryo" pitchFamily="34" charset="-122"/>
+                <a:cs typeface="Meiryo" pitchFamily="34" charset="-120"/>
+              </a:rPr>
+              <a:t>検証結果をもとに、効かない施策を早く止め、効く施策に人手を集中できる。同じリソースでも成果に繋がる仕事の比率が上がる。</a:t>
+            </a:r>
+            <a:endParaRPr lang="en-US" sz="1300" dirty="0"/>
+          </a:p>
+        </p:txBody>
+      </p:sp>
+      <p:sp>
+        <p:nvSpPr>
+          <p:cNvPr id="16" name="Shape 14"/>
+          <p:cNvSpPr/>
+          <p:nvPr/>
+        </p:nvSpPr>
+        <p:spPr>
+          <a:xfrm>
+            <a:off x="4800600" y="1554480"/>
+            <a:ext cx="3977640" cy="3337560"/>
+          </a:xfrm>
+          <a:prstGeom prst="roundRect">
+            <a:avLst>
+              <a:gd name="adj" fmla="val 822"/>
+            </a:avLst>
+          </a:prstGeom>
+          <a:solidFill>
+            <a:srgbClr val="F8FAFC"/>
+          </a:solidFill>
+          <a:ln/>
+        </p:spPr>
+        <p:txBody>
+          <a:bodyPr/>
+          <a:lstStyle/>
+          <a:p>
+            <a:endParaRPr lang="ja-JP" altLang="en-US"/>
+          </a:p>
+        </p:txBody>
+      </p:sp>
+      <p:sp>
+        <p:nvSpPr>
+          <p:cNvPr id="18" name="Text 16"/>
+          <p:cNvSpPr/>
+          <p:nvPr/>
+        </p:nvSpPr>
+        <p:spPr>
+          <a:xfrm>
+            <a:off x="4833769" y="1691640"/>
+            <a:ext cx="1828800" cy="457200"/>
+          </a:xfrm>
+          <a:prstGeom prst="rect">
+            <a:avLst/>
+          </a:prstGeom>
+          <a:noFill/>
+          <a:ln/>
+        </p:spPr>
+        <p:txBody>
+          <a:bodyPr wrap="square" rtlCol="0" anchor="ctr"/>
+          <a:lstStyle/>
+          <a:p>
+            <a:pPr marL="0" indent="0" algn="l">
+              <a:buNone/>
+            </a:pPr>
+            <a:r>
+              <a:rPr lang="en-US" sz="1600" b="1" dirty="0" err="1">
+                <a:solidFill>
+                  <a:srgbClr val="444466"/>
+                </a:solidFill>
+                <a:latin typeface="Meiryo" pitchFamily="34" charset="0"/>
+                <a:ea typeface="Meiryo" pitchFamily="34" charset="-122"/>
+                <a:cs typeface="Meiryo" pitchFamily="34" charset="-120"/>
+              </a:rPr>
+              <a:t>現状</a:t>
+            </a:r>
+            <a:endParaRPr lang="en-US" sz="1600" b="1" dirty="0"/>
+          </a:p>
+        </p:txBody>
+      </p:sp>
+      <p:sp>
+        <p:nvSpPr>
+          <p:cNvPr id="19" name="Shape 17"/>
+          <p:cNvSpPr/>
+          <p:nvPr/>
+        </p:nvSpPr>
+        <p:spPr>
+          <a:xfrm>
+            <a:off x="4983480" y="2286000"/>
+            <a:ext cx="3566160" cy="320040"/>
+          </a:xfrm>
+          <a:prstGeom prst="roundRect">
+            <a:avLst>
+              <a:gd name="adj" fmla="val 5714"/>
+            </a:avLst>
+          </a:prstGeom>
+          <a:solidFill>
+            <a:srgbClr val="757575"/>
+          </a:solidFill>
+          <a:ln/>
+        </p:spPr>
+        <p:txBody>
+          <a:bodyPr/>
+          <a:lstStyle/>
+          <a:p>
+            <a:endParaRPr lang="ja-JP" altLang="en-US"/>
+          </a:p>
+        </p:txBody>
+      </p:sp>
+      <p:sp>
+        <p:nvSpPr>
+          <p:cNvPr id="20" name="Text 18"/>
+          <p:cNvSpPr/>
+          <p:nvPr/>
+        </p:nvSpPr>
+        <p:spPr>
+          <a:xfrm>
+            <a:off x="4983480" y="2286000"/>
+            <a:ext cx="3566160" cy="320040"/>
+          </a:xfrm>
+          <a:prstGeom prst="rect">
+            <a:avLst/>
+          </a:prstGeom>
+          <a:noFill/>
+          <a:ln/>
+        </p:spPr>
+        <p:txBody>
+          <a:bodyPr wrap="square" rtlCol="0" anchor="ctr"/>
+          <a:lstStyle/>
+          <a:p>
+            <a:pPr marL="0" indent="0" algn="ctr">
+              <a:buNone/>
+            </a:pPr>
+            <a:r>
+              <a:rPr lang="en-US" sz="1200" b="1" dirty="0">
+                <a:solidFill>
+                  <a:srgbClr val="FFFFFF"/>
+                </a:solidFill>
+                <a:latin typeface="Meiryo" pitchFamily="34" charset="0"/>
+                <a:ea typeface="Meiryo" pitchFamily="34" charset="-122"/>
+                <a:cs typeface="Meiryo" pitchFamily="34" charset="-120"/>
+              </a:rPr>
+              <a:t>検証 → 次の施策へ反映　3ヶ月以上 or 未反映</a:t>
+            </a:r>
+            <a:endParaRPr lang="en-US" sz="1200" dirty="0"/>
+          </a:p>
+        </p:txBody>
+      </p:sp>
+      <p:sp>
+        <p:nvSpPr>
+          <p:cNvPr id="21" name="Text 19"/>
+          <p:cNvSpPr/>
+          <p:nvPr/>
+        </p:nvSpPr>
+        <p:spPr>
+          <a:xfrm>
+            <a:off x="4983480" y="2788920"/>
             <a:ext cx="3611880" cy="1828800"/>
           </a:xfrm>
           <a:prstGeom prst="rect">
@@ -4259,7 +4657,7 @@
               <a:buNone/>
             </a:pPr>
             <a:r>
-              <a:rPr lang="en-US" sz="1300" dirty="0">
+              <a:rPr lang="ja-JP" altLang="en-US" sz="1300">
                 <a:solidFill>
                   <a:srgbClr val="1A1A2E"/>
                 </a:solidFill>
@@ -4267,32 +4665,71 @@
                 <a:ea typeface="Meiryo" pitchFamily="34" charset="-122"/>
                 <a:cs typeface="Meiryo" pitchFamily="34" charset="-120"/>
               </a:rPr>
-              <a:t>効果のない施策を早く止めて、効く施策に人手を寄せられる。同じリソースでも、成果に繋がる仕事の比率が上がる。</a:t>
-            </a:r>
-            <a:endParaRPr lang="en-US" sz="1300" dirty="0"/>
-          </a:p>
-        </p:txBody>
-      </p:sp>
-      <p:sp>
-        <p:nvSpPr>
-          <p:cNvPr id="16" name="Shape 14"/>
-          <p:cNvSpPr/>
-          <p:nvPr/>
-        </p:nvSpPr>
-        <p:spPr>
-          <a:xfrm>
-            <a:off x="4800600" y="1554480"/>
-            <a:ext cx="3977640" cy="3337560"/>
-          </a:xfrm>
-          <a:prstGeom prst="roundRect">
-            <a:avLst>
-              <a:gd name="adj" fmla="val 822"/>
-            </a:avLst>
-          </a:prstGeom>
-          <a:solidFill>
-            <a:srgbClr val="F8FAFC"/>
-          </a:solidFill>
-          <a:ln/>
+              <a:t>開発要件が大きいまま着手すると、小さく検証する余地がない。効果が出るかわからないまま時間がかかってしまい、結果として施策の精度が上がらない悪循環となっている。</a:t>
+            </a:r>
+          </a:p>
+        </p:txBody>
+      </p:sp>
+    </p:spTree>
+  </p:cSld>
+  <p:clrMapOvr>
+    <a:masterClrMapping/>
+  </p:clrMapOvr>
+</p:sld>
+</file>
+
+<file path=ppt/slides/slide6.xml><?xml version="1.0" encoding="utf-8"?>
+<p:sld xmlns:a="http://schemas.openxmlformats.org/drawingml/2006/main" xmlns:r="http://schemas.openxmlformats.org/officeDocument/2006/relationships" xmlns:p="http://schemas.openxmlformats.org/presentationml/2006/main">
+  <p:cSld>
+    <p:spTree>
+      <p:nvGrpSpPr>
+        <p:cNvPr id="1" name="">
+          <a:extLst>
+            <a:ext uri="{FF2B5EF4-FFF2-40B4-BE49-F238E27FC236}">
+              <a16:creationId xmlns:a16="http://schemas.microsoft.com/office/drawing/2014/main" id="{63EB80AB-0D77-5BE7-E0D6-AD3C2B08D603}"/>
+            </a:ext>
+          </a:extLst>
+        </p:cNvPr>
+        <p:cNvGrpSpPr/>
+        <p:nvPr/>
+      </p:nvGrpSpPr>
+      <p:grpSpPr>
+        <a:xfrm>
+          <a:off x="0" y="0"/>
+          <a:ext cx="0" cy="0"/>
+          <a:chOff x="0" y="0"/>
+          <a:chExt cx="0" cy="0"/>
+        </a:xfrm>
+      </p:grpSpPr>
+      <p:sp>
+        <p:nvSpPr>
+          <p:cNvPr id="2" name="Shape 0">
+            <a:extLst>
+              <a:ext uri="{FF2B5EF4-FFF2-40B4-BE49-F238E27FC236}">
+                <a16:creationId xmlns:a16="http://schemas.microsoft.com/office/drawing/2014/main" id="{CD0A2A1E-4531-C02F-F00D-122ED1CF1693}"/>
+              </a:ext>
+            </a:extLst>
+          </p:cNvPr>
+          <p:cNvSpPr/>
+          <p:nvPr/>
+        </p:nvSpPr>
+        <p:spPr>
+          <a:xfrm>
+            <a:off x="0" y="5084064"/>
+            <a:ext cx="7315200" cy="64008"/>
+          </a:xfrm>
+          <a:prstGeom prst="rect">
+            <a:avLst/>
+          </a:prstGeom>
+          <a:solidFill>
+            <a:srgbClr val="004098"/>
+          </a:solidFill>
+          <a:ln w="12700">
+            <a:solidFill>
+              <a:srgbClr val="004098"/>
+            </a:solidFill>
+            <a:prstDash val="solid"/>
+          </a:ln>
         </p:spPr>
         <p:txBody>
           <a:bodyPr/>
@@ -4304,14 +4741,96 @@
       </p:sp>
       <p:sp>
         <p:nvSpPr>
-          <p:cNvPr id="18" name="Text 16"/>
-          <p:cNvSpPr/>
-          <p:nvPr/>
-        </p:nvSpPr>
-        <p:spPr>
-          <a:xfrm>
-            <a:off x="4833769" y="1691640"/>
-            <a:ext cx="1828800" cy="457200"/>
+          <p:cNvPr id="3" name="Shape 1">
+            <a:extLst>
+              <a:ext uri="{FF2B5EF4-FFF2-40B4-BE49-F238E27FC236}">
+                <a16:creationId xmlns:a16="http://schemas.microsoft.com/office/drawing/2014/main" id="{067D4A13-0CE0-517B-04EF-F1186CA04CFC}"/>
+              </a:ext>
+            </a:extLst>
+          </p:cNvPr>
+          <p:cNvSpPr/>
+          <p:nvPr/>
+        </p:nvSpPr>
+        <p:spPr>
+          <a:xfrm>
+            <a:off x="7315200" y="5084064"/>
+            <a:ext cx="1828800" cy="64008"/>
+          </a:xfrm>
+          <a:prstGeom prst="rect">
+            <a:avLst/>
+          </a:prstGeom>
+          <a:solidFill>
+            <a:srgbClr val="DC2626"/>
+          </a:solidFill>
+          <a:ln w="12700">
+            <a:solidFill>
+              <a:srgbClr val="DC2626"/>
+            </a:solidFill>
+            <a:prstDash val="solid"/>
+          </a:ln>
+        </p:spPr>
+        <p:txBody>
+          <a:bodyPr/>
+          <a:lstStyle/>
+          <a:p>
+            <a:endParaRPr lang="ja-JP" altLang="en-US"/>
+          </a:p>
+        </p:txBody>
+      </p:sp>
+      <p:sp>
+        <p:nvSpPr>
+          <p:cNvPr id="5" name="Shape 3">
+            <a:extLst>
+              <a:ext uri="{FF2B5EF4-FFF2-40B4-BE49-F238E27FC236}">
+                <a16:creationId xmlns:a16="http://schemas.microsoft.com/office/drawing/2014/main" id="{CD89AC71-6B25-11F2-4B8C-22136D3C61BE}"/>
+              </a:ext>
+            </a:extLst>
+          </p:cNvPr>
+          <p:cNvSpPr/>
+          <p:nvPr/>
+        </p:nvSpPr>
+        <p:spPr>
+          <a:xfrm>
+            <a:off x="0" y="310896"/>
+            <a:ext cx="9144000" cy="9144"/>
+          </a:xfrm>
+          <a:prstGeom prst="rect">
+            <a:avLst/>
+          </a:prstGeom>
+          <a:solidFill>
+            <a:srgbClr val="CADCFC"/>
+          </a:solidFill>
+          <a:ln w="12700">
+            <a:solidFill>
+              <a:srgbClr val="CADCFC"/>
+            </a:solidFill>
+            <a:prstDash val="solid"/>
+          </a:ln>
+        </p:spPr>
+        <p:txBody>
+          <a:bodyPr/>
+          <a:lstStyle/>
+          <a:p>
+            <a:endParaRPr lang="ja-JP" altLang="en-US"/>
+          </a:p>
+        </p:txBody>
+      </p:sp>
+      <p:sp>
+        <p:nvSpPr>
+          <p:cNvPr id="6" name="Text 4">
+            <a:extLst>
+              <a:ext uri="{FF2B5EF4-FFF2-40B4-BE49-F238E27FC236}">
+                <a16:creationId xmlns:a16="http://schemas.microsoft.com/office/drawing/2014/main" id="{D6608471-1514-AB4D-89FA-5DEA6626D04C}"/>
+              </a:ext>
+            </a:extLst>
+          </p:cNvPr>
+          <p:cNvSpPr/>
+          <p:nvPr/>
+        </p:nvSpPr>
+        <p:spPr>
+          <a:xfrm>
+            <a:off x="305304" y="532015"/>
+            <a:ext cx="7040124" cy="256032"/>
           </a:xfrm>
           <a:prstGeom prst="rect">
             <a:avLst/>
@@ -4327,131 +4846,81 @@
               <a:buNone/>
             </a:pPr>
             <a:r>
-              <a:rPr lang="en-US" sz="1600" b="1" dirty="0">
-                <a:solidFill>
-                  <a:srgbClr val="444466"/>
-                </a:solidFill>
-                <a:latin typeface="Meiryo" pitchFamily="34" charset="0"/>
-                <a:ea typeface="Meiryo" pitchFamily="34" charset="-122"/>
-                <a:cs typeface="Meiryo" pitchFamily="34" charset="-120"/>
-              </a:rPr>
-              <a:t>最低ライン</a:t>
-            </a:r>
-            <a:endParaRPr lang="en-US" sz="1600" b="1" dirty="0"/>
-          </a:p>
-        </p:txBody>
-      </p:sp>
-      <p:sp>
-        <p:nvSpPr>
-          <p:cNvPr id="19" name="Shape 17"/>
-          <p:cNvSpPr/>
-          <p:nvPr/>
-        </p:nvSpPr>
-        <p:spPr>
-          <a:xfrm>
-            <a:off x="4983480" y="2286000"/>
-            <a:ext cx="3566160" cy="320040"/>
-          </a:xfrm>
-          <a:prstGeom prst="roundRect">
-            <a:avLst>
-              <a:gd name="adj" fmla="val 5714"/>
-            </a:avLst>
-          </a:prstGeom>
-          <a:solidFill>
-            <a:srgbClr val="757575"/>
-          </a:solidFill>
-          <a:ln/>
-        </p:spPr>
-        <p:txBody>
-          <a:bodyPr/>
-          <a:lstStyle/>
-          <a:p>
-            <a:endParaRPr lang="ja-JP" altLang="en-US"/>
-          </a:p>
-        </p:txBody>
-      </p:sp>
-      <p:sp>
-        <p:nvSpPr>
-          <p:cNvPr id="20" name="Text 18"/>
-          <p:cNvSpPr/>
-          <p:nvPr/>
-        </p:nvSpPr>
-        <p:spPr>
-          <a:xfrm>
-            <a:off x="4983480" y="2286000"/>
-            <a:ext cx="3566160" cy="320040"/>
-          </a:xfrm>
-          <a:prstGeom prst="rect">
-            <a:avLst/>
-          </a:prstGeom>
-          <a:noFill/>
-          <a:ln/>
-        </p:spPr>
-        <p:txBody>
-          <a:bodyPr wrap="square" rtlCol="0" anchor="ctr"/>
-          <a:lstStyle/>
-          <a:p>
-            <a:pPr marL="0" indent="0" algn="ctr">
-              <a:buNone/>
-            </a:pPr>
-            <a:r>
-              <a:rPr lang="en-US" sz="1200" b="1" dirty="0">
-                <a:solidFill>
-                  <a:srgbClr val="FFFFFF"/>
-                </a:solidFill>
-                <a:latin typeface="Meiryo" pitchFamily="34" charset="0"/>
-                <a:ea typeface="Meiryo" pitchFamily="34" charset="-122"/>
-                <a:cs typeface="Meiryo" pitchFamily="34" charset="-120"/>
-              </a:rPr>
-              <a:t>検証 → 次の施策へ反映　3ヶ月以上 or 未反映</a:t>
-            </a:r>
-            <a:endParaRPr lang="en-US" sz="1200" dirty="0"/>
-          </a:p>
-        </p:txBody>
-      </p:sp>
-      <p:sp>
-        <p:nvSpPr>
-          <p:cNvPr id="21" name="Text 19"/>
-          <p:cNvSpPr/>
-          <p:nvPr/>
-        </p:nvSpPr>
-        <p:spPr>
-          <a:xfrm>
-            <a:off x="4983480" y="2788920"/>
-            <a:ext cx="3611880" cy="1828800"/>
-          </a:xfrm>
-          <a:prstGeom prst="rect">
-            <a:avLst/>
-          </a:prstGeom>
-          <a:noFill/>
-          <a:ln/>
-        </p:spPr>
-        <p:txBody>
-          <a:bodyPr wrap="square" rtlCol="0" anchor="t"/>
-          <a:lstStyle/>
-          <a:p>
-            <a:pPr marL="0" indent="0" algn="l">
-              <a:lnSpc>
-                <a:spcPct val="160000"/>
-              </a:lnSpc>
-              <a:buNone/>
-            </a:pPr>
-            <a:r>
-              <a:rPr lang="en-US" sz="1300" dirty="0">
-                <a:solidFill>
-                  <a:srgbClr val="1A1A2E"/>
-                </a:solidFill>
-                <a:latin typeface="Meiryo" pitchFamily="34" charset="0"/>
-                <a:ea typeface="Meiryo" pitchFamily="34" charset="-122"/>
-                <a:cs typeface="Meiryo" pitchFamily="34" charset="-120"/>
-              </a:rPr>
-              <a:t>効いたかどうかわからないまま次に進む。効果のない施策を止められず、人手が分散したまま成果が出ない。</a:t>
-            </a:r>
-            <a:endParaRPr lang="en-US" sz="1300" dirty="0"/>
-          </a:p>
-        </p:txBody>
-      </p:sp>
+              <a:rPr lang="en-US" sz="1600" dirty="0" err="1">
+                <a:solidFill>
+                  <a:srgbClr val="546E8A"/>
+                </a:solidFill>
+                <a:latin typeface="Meiryo" panose="020B0604030504040204" pitchFamily="34" charset="-128"/>
+                <a:ea typeface="Meiryo" panose="020B0604030504040204" pitchFamily="34" charset="-128"/>
+                <a:cs typeface="Arial" pitchFamily="34" charset="-120"/>
+              </a:rPr>
+              <a:t>参考</a:t>
+            </a:r>
+            <a:r>
+              <a:rPr lang="ja-JP" altLang="en-US" sz="1600">
+                <a:solidFill>
+                  <a:srgbClr val="546E8A"/>
+                </a:solidFill>
+                <a:latin typeface="Meiryo" panose="020B0604030504040204" pitchFamily="34" charset="-128"/>
+                <a:ea typeface="Meiryo" panose="020B0604030504040204" pitchFamily="34" charset="-128"/>
+                <a:cs typeface="Arial" pitchFamily="34" charset="-120"/>
+              </a:rPr>
+              <a:t>　小さく検証サイクルを回した例　会員施策の</a:t>
+            </a:r>
+            <a:r>
+              <a:rPr lang="en-US" altLang="ja-JP" sz="1600" dirty="0">
+                <a:solidFill>
+                  <a:srgbClr val="546E8A"/>
+                </a:solidFill>
+                <a:latin typeface="Meiryo" panose="020B0604030504040204" pitchFamily="34" charset="-128"/>
+                <a:ea typeface="Meiryo" panose="020B0604030504040204" pitchFamily="34" charset="-128"/>
+                <a:cs typeface="Arial" pitchFamily="34" charset="-120"/>
+              </a:rPr>
+              <a:t>SMS</a:t>
+            </a:r>
+            <a:endParaRPr lang="en-US" sz="1600" dirty="0">
+              <a:latin typeface="Meiryo" panose="020B0604030504040204" pitchFamily="34" charset="-128"/>
+              <a:ea typeface="Meiryo" panose="020B0604030504040204" pitchFamily="34" charset="-128"/>
+            </a:endParaRPr>
+          </a:p>
+        </p:txBody>
+      </p:sp>
+      <p:pic>
+        <p:nvPicPr>
+          <p:cNvPr id="8" name="図 7">
+            <a:extLst>
+              <a:ext uri="{FF2B5EF4-FFF2-40B4-BE49-F238E27FC236}">
+                <a16:creationId xmlns:a16="http://schemas.microsoft.com/office/drawing/2014/main" id="{89BF8E1C-9B5E-0483-A110-A758EF6B10C8}"/>
+              </a:ext>
+            </a:extLst>
+          </p:cNvPr>
+          <p:cNvPicPr>
+            <a:picLocks noChangeAspect="1"/>
+          </p:cNvPicPr>
+          <p:nvPr/>
+        </p:nvPicPr>
+        <p:blipFill>
+          <a:blip r:embed="rId3"/>
+          <a:stretch>
+            <a:fillRect/>
+          </a:stretch>
+        </p:blipFill>
+        <p:spPr>
+          <a:xfrm>
+            <a:off x="338175" y="919170"/>
+            <a:ext cx="8520869" cy="3871983"/>
+          </a:xfrm>
+          <a:prstGeom prst="rect">
+            <a:avLst/>
+          </a:prstGeom>
+        </p:spPr>
+      </p:pic>
     </p:spTree>
+    <p:extLst>
+      <p:ext uri="{BB962C8B-B14F-4D97-AF65-F5344CB8AC3E}">
+        <p14:creationId xmlns:p14="http://schemas.microsoft.com/office/powerpoint/2010/main" val="4142934524"/>
+      </p:ext>
+    </p:extLst>
   </p:cSld>
   <p:clrMapOvr>
     <a:masterClrMapping/>
